--- a/GHCPSDK/pdfs/contact_ppt.pptx
+++ b/GHCPSDK/pdfs/contact_ppt.pptx
@@ -3429,7 +3429,7 @@
             </a:r>
             <a:r>
               <a:rPr lang="en-US" sz="4800"/>
-              <a:t>right side.</a:t>
+              <a:t>right side..</a:t>
             </a:r>
           </a:p>
         </p:txBody>
